--- a/sejong_app/docs/저작권등록_2026-09-23/01_소스코드_플랫폼SW(챗봇포함).pptx
+++ b/sejong_app/docs/저작권등록_2026-09-23/01_소스코드_플랫폼SW(챗봇포함).pptx
@@ -5113,7 +5113,7 @@
         <p:spPr>
           <a:xfrm>
             <a:off x="502920" y="1060704"/>
-            <a:ext cx="5455767" cy="5038344"/>
+            <a:ext cx="5455767" cy="5152644"/>
           </a:xfrm>
           <a:prstGeom prst="rect">
             <a:avLst/>
@@ -5159,7 +5159,7 @@
         <p:spPr>
           <a:xfrm>
             <a:off x="594360" y="1152144"/>
-            <a:ext cx="5272887" cy="4855464"/>
+            <a:ext cx="5272887" cy="4969764"/>
           </a:xfrm>
           <a:prstGeom prst="rect">
             <a:avLst/>
@@ -6103,7 +6103,7 @@
         <p:spPr>
           <a:xfrm>
             <a:off x="6233007" y="1060704"/>
-            <a:ext cx="5455767" cy="5038344"/>
+            <a:ext cx="5455767" cy="5152644"/>
           </a:xfrm>
           <a:prstGeom prst="rect">
             <a:avLst/>
@@ -6149,7 +6149,7 @@
         <p:spPr>
           <a:xfrm>
             <a:off x="6324447" y="1152144"/>
-            <a:ext cx="5272887" cy="4855464"/>
+            <a:ext cx="5272887" cy="4969764"/>
           </a:xfrm>
           <a:prstGeom prst="rect">
             <a:avLst/>
